--- a/out/analysis/dnssec_rfc_why.pptx
+++ b/out/analysis/dnssec_rfc_why.pptx
@@ -5035,7 +5035,7 @@
                 </a:solidFill>
                 <a:latin typeface="Segoe UI"/>
               </a:rPr>
-              <a:t>DNSSEC CVEs per program: BIND 9 40, Unbound 16, PowerDNS Rec 12, PowerDNS Auth 3, NSD 0, OpenDNSSEC 0. NSD and OpenDNSSEC do not validate. 69 of 97 DNSSEC CVEs sit in the validation core every signed zone shares -- KeyTrap (CVE-2023-50387) among them, with git-dated fixes from 3 vendors spread over 148 days. No algorithm choice avoids any of it.</a:t>
+              <a:t>DNSSEC CVEs per program: BIND 9 40, Unbound 16, PowerDNS Rec 12, PowerDNS Auth 0, NSD 0, OpenDNSSEC 0. NSD and OpenDNSSEC do not validate. 69 of 97 DNSSEC CVEs sit in the validation core every signed zone shares -- KeyTrap (CVE-2023-50387) among them, with git-dated fixes from 4 vendors spread over 7 days. No algorithm choice avoids any of it.</a:t>
             </a:r>
           </a:p>
         </p:txBody>

--- a/out/analysis/dnssec_rfc_why.pptx
+++ b/out/analysis/dnssec_rfc_why.pptx
@@ -3644,7 +3644,7 @@
                 </a:solidFill>
                 <a:latin typeface="Segoe UI"/>
               </a:rPr>
-              <a:t>Across the five mechanisms with a release history, RFC-to-signer runs -0.4 to +1.8 years and signer-to-first-zone 0.1 to 3.8. For the two slowest, ECDSA and GOST, the whole onset is the second number; CDS is the exception, where the code itself took 1.8 years. Speed is mostly decided after the code ships, by the mechanism that carries the value to a zone:</a:t>
+              <a:t>Across the five mechanisms with a release history, RFC-to-signer runs -0.4 to +1.8 years and signer-to-first-zone 0.2 to 3.9. For the two slowest, ECDSA and GOST, the whole onset is the second number; CDS is the exception, where the code itself took 1.8 years. Speed is mostly decided after the code ships, by the mechanism that carries the value to a zone:</a:t>
             </a:r>
           </a:p>
         </p:txBody>
@@ -6424,7 +6424,7 @@
                 </a:solidFill>
                 <a:latin typeface="Segoe UI"/>
               </a:rPr>
-              <a:t>published 2009-10  ·  first signer BIND 9 9.7.0 2010-02  ·  first validator Unbound 1.1.0 2008-11  ·  first zone 2010-03 (reverse)  ·  onset 0.4 y = code +0.3 + operators 0.1  ·  RSASHA256 10% at 2012-06  ·  forward now 24.4%  ·  reverse now 22.7%  ·  largest spike +60,903 .ch 2021-12 (SWITCH)</a:t>
+              <a:t>published 2009-10  ·  first signer BIND 9 9.7.0 2010-02  ·  first validator Unbound 1.1.0 2008-11  ·  first zone 2010-04 (reverse)  ·  onset 0.5 y = code +0.3 + operators 0.2  ·  RSASHA256 10% at 2012-06  ·  forward now 24.4%  ·  reverse now 22.7%  ·  largest spike +60,903 .ch 2021-12 (SWITCH)</a:t>
             </a:r>
           </a:p>
         </p:txBody>
@@ -7003,7 +7003,7 @@
                 </a:solidFill>
                 <a:latin typeface="Segoe UI"/>
               </a:rPr>
-              <a:t>The code was never the wait: PowerDNS signed ECDSA three months before the RFC, Unbound validated it one month after, and the first zone came 3.8 years later. Knot (2016-01, at 0.25% share) and PowerDNS (2016-07, at 0.72%) then made it their default, and .se and .nu show their first ECDSA jump in 2016-10 (+10,788 and +857), three months after PowerDNS 4.0.0 -- an alignment, not an attribution: on the reverse panel, the only corpus with a before-period, event studies around both defaults detect nothing (+0.034 and -0.043 pp/month). The forward rise is two registries: .se migrating 119,500 zones in 2019-01, SWITCH mass-signing .ch (+174,356) in 2021-08. The reverse curve's owners are network blocks: the largest single ECDSA action is 116 delegations under 45.130.in-addr.arpa in 2026-03.</a:t>
+              <a:t>The code was never the wait: PowerDNS signed ECDSA three months before the RFC, Unbound validated it one month after, and the first zone came 3.9 years later. Knot (2016-01, at 0.25% share) and PowerDNS (2016-07, at 0.72%) then made it their default, and .se and .nu show their first ECDSA jump in 2016-10 (+10,788 and +857), three months after PowerDNS 4.0.0 -- an alignment, not an attribution: on the reverse panel, the only corpus with a before-period, event studies around both defaults detect nothing (+0.034 and -0.043 pp/month). The forward rise is two registries: .se migrating 119,500 zones in 2019-01, SWITCH mass-signing .ch (+174,356) in 2021-08. The reverse curve's owners are network blocks: the largest single ECDSA action is 116 delegations under 45.130.in-addr.arpa in 2026-03.</a:t>
             </a:r>
           </a:p>
         </p:txBody>
@@ -7042,7 +7042,7 @@
                 </a:solidFill>
                 <a:latin typeface="Segoe UI"/>
               </a:rPr>
-              <a:t>published 2012-04  ·  first signer PowerDNS Auth 3.0.1 2012-01  ·  first validator Unbound 1.4.17 2012-05  ·  first zone 2015-11 (reverse)  ·  onset 3.6 y = code -0.2 + operators 3.8  ·  ECDSAP256SHA256 10% at 2019-03  ·  forward now 76.1%  ·  reverse now 70.7%  ·  published when RFC 5702 was at 16% of its eventual share  ·  2 CVEs naming it, first 2018-01  ·  largest spike +174,356 .ch 2021-08 (SWITCH)</a:t>
+              <a:t>published 2012-04  ·  first signer PowerDNS Auth 3.0.1 2012-01  ·  first validator Unbound 1.4.17 2012-05  ·  first zone 2015-12 (reverse)  ·  onset 3.7 y = code -0.2 + operators 3.9  ·  ECDSAP256SHA256 10% at 2019-03  ·  forward now 76.1%  ·  reverse now 70.7%  ·  published when RFC 5702 was at 16% of its eventual share  ·  2 CVEs naming it, first 2018-01  ·  largest spike +174,356 .ch 2021-08 (SWITCH)</a:t>
             </a:r>
           </a:p>
         </p:txBody>
@@ -7415,7 +7415,7 @@
                 </a:solidFill>
                 <a:latin typeface="Segoe UI"/>
               </a:rPr>
-              <a:t>Knot, Unbound and BIND shipped EdDSA within a year of the RFC; OpenDNSSEC took 3.6. No vendor ever made it a default. It was published when ECDSA stood at 1% of the share it would reach. Nine years on: 0.37% of panel delegations, 0.01% of forward zones; the only spikes were one operator's .se and .nu moves, withdrawn twice. One CVE names EdDSA (CVE-2022-38178), published at 0.02% deployment.</a:t>
+              <a:t>Knot, Unbound and BIND shipped EdDSA within a year of the RFC; OpenDNSSEC took 3.6. No vendor ever made it a default. It was published when ECDSA stood at 1% of the share it would reach. Nine years on: 0.37% of panel delegations, 0.01% of forward zones; the only spikes were one operator's .se and .nu moves, withdrawn twice. One CVE names EdDSA (CVE-2022-38178), published at 0.03% deployment (strict panel).</a:t>
             </a:r>
           </a:p>
         </p:txBody>
@@ -7660,7 +7660,7 @@
                 </a:solidFill>
                 <a:latin typeface="Segoe UI"/>
               </a:rPr>
-              <a:t>published 2010-07  ·  first signer BIND 9 9.6.2 2010-02  ·  first validator Unbound 1.4.0 2009-11  ·  first zone 2012-12 (reverse)  ·  onset 2.4 y = code -0.4 + operators 2.8  ·  forward now 0.0%  ·  reverse now 0.0%  ·  published when RFC 5702 was at 1% of its eventual share</a:t>
+              <a:t>published 2010-07  ·  first signer BIND 9 9.6.2 2010-02  ·  first validator Unbound 1.4.0 2009-11  ·  first zone 2013-01 (reverse)  ·  onset 2.5 y = code -0.4 + operators 2.9  ·  forward now 0.0%  ·  reverse now 0.0%  ·  published when RFC 5702 was at 1% of its eventual share</a:t>
             </a:r>
           </a:p>
         </p:txBody>
